--- a/week-2/day-1/AI_Powered_Architecture_Presentation.pptx
+++ b/week-2/day-1/AI_Powered_Architecture_Presentation.pptx
@@ -7805,20 +7805,26 @@
             <p:ph idx="1"/>
           </p:nvPr>
         </p:nvSpPr>
-        <p:spPr/>
+        <p:spPr>
+          <a:xfrm>
+            <a:off x="827700" y="1432193"/>
+            <a:ext cx="6711654" cy="4816213"/>
+          </a:xfrm>
+        </p:spPr>
         <p:txBody>
           <a:bodyPr wrap="square">
-            <a:normAutofit fontScale="92500" lnSpcReduction="20000"/>
+            <a:normAutofit lnSpcReduction="10000"/>
           </a:bodyPr>
           <a:lstStyle/>
           <a:p>
-            <a:endParaRPr/>
+            <a:endParaRPr dirty="0"/>
           </a:p>
           <a:p>
             <a:pPr>
               <a:defRPr sz="2000"/>
             </a:pPr>
             <a:r>
+              <a:rPr dirty="0"/>
               <a:t>REST APIs: Standard, synchronous integration for simple, request-response AI features.</a:t>
             </a:r>
           </a:p>
@@ -7827,7 +7833,12 @@
               <a:defRPr sz="2000"/>
             </a:pPr>
             <a:r>
-              <a:t>gRPC: High-performance, low-latency communication for internal microservices and heavy payload transfers.</a:t>
+              <a:rPr dirty="0" err="1"/>
+              <a:t>gRPC</a:t>
+            </a:r>
+            <a:r>
+              <a:rPr dirty="0"/>
+              <a:t>: High-performance, low-latency communication for internal microservices and heavy payload transfers.</a:t>
             </a:r>
           </a:p>
           <a:p>
@@ -7835,6 +7846,7 @@
               <a:defRPr sz="2000"/>
             </a:pPr>
             <a:r>
+              <a:rPr dirty="0"/>
               <a:t>Asynchronous Event Streams (Kafka, RabbitMQ):</a:t>
             </a:r>
           </a:p>
@@ -7843,6 +7855,7 @@
               <a:defRPr sz="2000"/>
             </a:pPr>
             <a:r>
+              <a:rPr dirty="0"/>
               <a:t>  - Decouples AI processing from core enterprise systems.</a:t>
             </a:r>
           </a:p>
@@ -7851,6 +7864,7 @@
               <a:defRPr sz="2000"/>
             </a:pPr>
             <a:r>
+              <a:rPr dirty="0"/>
               <a:t>  - Ideal for long-running inference jobs, batch processing, and event-driven AI agents.</a:t>
             </a:r>
           </a:p>
@@ -7859,6 +7873,7 @@
               <a:defRPr sz="2000"/>
             </a:pPr>
             <a:r>
+              <a:rPr dirty="0"/>
               <a:t>Legacy Integration: Use API gateways and adapters to seamlessly wrap AI services for older systems.</a:t>
             </a:r>
           </a:p>
